--- a/praesentationen/tag-3-compute-und-storage.pptx
+++ b/praesentationen/tag-3-compute-und-storage.pptx
@@ -114,13 +114,13 @@
   <p:extLst>
     <p:ext uri="{521415D9-36F7-43E2-AB2F-B90AF26B5E84}">
       <p14:sectionLst xmlns:p14="http://schemas.microsoft.com/office/powerpoint/2010/main">
-        <p14:section name="Start" id="{ba0b99d5-2f08-064e-3c46-9367b9cfd35e}">
+        <p14:section name="Start" id="{5ee52c2b-c409-54f6-5f38-c1339ddee2ea}">
           <p14:sldIdLst>
             <p14:sldId id="256"/>
             <p14:sldId id="257"/>
           </p14:sldIdLst>
         </p14:section>
-        <p14:section name="Heute" id="{4277fff1-52d7-2e01-8ed6-cb5cc7d371ed}">
+        <p14:section name="Heute" id="{d7c64f9b-729e-6070-be38-5e303a578a40}">
           <p14:sldIdLst>
             <p14:sldId id="258"/>
             <p14:sldId id="259"/>
@@ -128,7 +128,7 @@
             <p14:sldId id="261"/>
           </p14:sldIdLst>
         </p14:section>
-        <p14:section name="Abschluss" id="{319c7385-eabb-486a-9ac5-5b23e8d06172}">
+        <p14:section name="Abschluss" id="{11b6ddcc-a2f2-bb75-23a6-e3b0d9425f31}">
           <p14:sldIdLst>
             <p14:sldId id="262"/>
             <p14:sldId id="263"/>
@@ -3540,7 +3540,7 @@
                   <a:srgbClr val="27303A"/>
                 </a:solidFill>
               </a:rPr>
-              <a:t>Vergleich (K4)</a:t>
+              <a:t>Tag 1 und Azure (K2)</a:t>
             </a:r>
             <a:endParaRPr lang="en-US" sz="2000" dirty="0"/>
           </a:p>
@@ -3579,7 +3579,7 @@
                   <a:srgbClr val="27303A"/>
                 </a:solidFill>
               </a:rPr>
-              <a:t>Du vergleichst deine lokale VM von Tag 1 mit der Azure-VM.</a:t>
+              <a:t>Du beschreibst, was deine Multipass-VM und die Azure-VM gemeinsam haben.</a:t>
             </a:r>
             <a:endParaRPr lang="en-US" sz="1600" dirty="0"/>
           </a:p>

--- a/praesentationen/tag-3-compute-und-storage.pptx
+++ b/praesentationen/tag-3-compute-und-storage.pptx
@@ -114,13 +114,13 @@
   <p:extLst>
     <p:ext uri="{521415D9-36F7-43E2-AB2F-B90AF26B5E84}">
       <p14:sectionLst xmlns:p14="http://schemas.microsoft.com/office/powerpoint/2010/main">
-        <p14:section name="Start" id="{5ee52c2b-c409-54f6-5f38-c1339ddee2ea}">
+        <p14:section name="Start" id="{d5f30465-c90b-7af4-f0e2-64be1f0a2755}">
           <p14:sldIdLst>
             <p14:sldId id="256"/>
             <p14:sldId id="257"/>
           </p14:sldIdLst>
         </p14:section>
-        <p14:section name="Heute" id="{d7c64f9b-729e-6070-be38-5e303a578a40}">
+        <p14:section name="Heute" id="{2c0beda7-ddba-5024-fd43-e7193a7de9cc}">
           <p14:sldIdLst>
             <p14:sldId id="258"/>
             <p14:sldId id="259"/>
@@ -128,7 +128,7 @@
             <p14:sldId id="261"/>
           </p14:sldIdLst>
         </p14:section>
-        <p14:section name="Abschluss" id="{11b6ddcc-a2f2-bb75-23a6-e3b0d9425f31}">
+        <p14:section name="Abschluss" id="{6bef4de5-3b4f-a0a7-a07a-bbcf6a41ac2a}">
           <p14:sldIdLst>
             <p14:sldId id="262"/>
             <p14:sldId id="263"/>
@@ -3387,7 +3387,7 @@
                   <a:srgbClr val="27303A"/>
                 </a:solidFill>
               </a:rPr>
-              <a:t>Storage Account (K3)</a:t>
+              <a:t>Speicherkonto (K3)</a:t>
             </a:r>
             <a:endParaRPr lang="en-US" sz="2000" dirty="0"/>
           </a:p>
@@ -3426,7 +3426,7 @@
                   <a:srgbClr val="27303A"/>
                 </a:solidFill>
               </a:rPr>
-              <a:t>Du legst einen Storage Account an und lädst Dateien als Blob hoch.</a:t>
+              <a:t>Du legst ein Speicherkonto (Storage Account) an und lädst Dateien hoch.</a:t>
             </a:r>
             <a:endParaRPr lang="en-US" sz="1600" dirty="0"/>
           </a:p>
@@ -4782,7 +4782,7 @@
                             <a:srgbClr val="27303A"/>
                           </a:solidFill>
                         </a:rPr>
-                        <a:t>Auftrag 3.4: Storage Account und Blob-Container</a:t>
+                        <a:t>Auftrag 3.4: Speicherkonto und Blob-Container</a:t>
                       </a:r>
                       <a:endParaRPr lang="en-US" sz="1700" dirty="0"/>
                     </a:p>
@@ -6155,7 +6155,7 @@
                             <a:srgbClr val="27303A"/>
                           </a:solidFill>
                         </a:rPr>
-                        <a:t>Storage Account und Blob-Container, Dateien hochladen</a:t>
+                        <a:t>Speicherkonto und Blob-Container, Dateien hochladen</a:t>
                       </a:r>
                       <a:endParaRPr lang="en-US" sz="1700" dirty="0"/>
                     </a:p>
@@ -6340,7 +6340,7 @@
                             <a:srgbClr val="27303A"/>
                           </a:solidFill>
                         </a:rPr>
-                        <a:t>Statische Website im Storage Account</a:t>
+                        <a:t>Statische Website im Speicherkonto</a:t>
                       </a:r>
                       <a:endParaRPr lang="en-US" sz="1700" dirty="0"/>
                     </a:p>

--- a/praesentationen/tag-3-compute-und-storage.pptx
+++ b/praesentationen/tag-3-compute-und-storage.pptx
@@ -114,13 +114,13 @@
   <p:extLst>
     <p:ext uri="{521415D9-36F7-43E2-AB2F-B90AF26B5E84}">
       <p14:sectionLst xmlns:p14="http://schemas.microsoft.com/office/powerpoint/2010/main">
-        <p14:section name="Start" id="{d5f30465-c90b-7af4-f0e2-64be1f0a2755}">
+        <p14:section name="Start" id="{80c6ef06-ed4f-18bc-f200-fb232ea7b16b}">
           <p14:sldIdLst>
             <p14:sldId id="256"/>
             <p14:sldId id="257"/>
           </p14:sldIdLst>
         </p14:section>
-        <p14:section name="Heute" id="{2c0beda7-ddba-5024-fd43-e7193a7de9cc}">
+        <p14:section name="Heute" id="{0ee85cc6-9e24-dce4-229c-2eb2054f22d9}">
           <p14:sldIdLst>
             <p14:sldId id="258"/>
             <p14:sldId id="259"/>
@@ -128,7 +128,7 @@
             <p14:sldId id="261"/>
           </p14:sldIdLst>
         </p14:section>
-        <p14:section name="Abschluss" id="{6bef4de5-3b4f-a0a7-a07a-bbcf6a41ac2a}">
+        <p14:section name="Abschluss" id="{bd3aa390-6e89-6615-6f7c-09e0cc8472b5}">
           <p14:sldIdLst>
             <p14:sldId id="262"/>
             <p14:sldId id="263"/>
@@ -1232,7 +1232,7 @@
     <p:bg>
       <p:bgPr>
         <a:solidFill>
-          <a:srgbClr val="27303A"/>
+          <a:srgbClr val="FFFFFF"/>
         </a:solidFill>
       </p:bgPr>
     </p:bg>
@@ -1252,7 +1252,7 @@
       </p:grpSpPr>
       <p:pic>
         <p:nvPicPr>
-          <p:cNvPr id="2" name="Image 0" descr="C:\Users\Thanam\AppData\Local\Temp\claude\c--Projekt-Trainings-azure-basics-training\a9e0bf4e-0d08-4082-a38a-5b8886538508\scratchpad\pptx\assets\logo-hell.png">    </p:cNvPr>
+          <p:cNvPr id="2" name="Image 0" descr="C:\Users\Thanam\AppData\Local\Temp\claude\c--Projekt-Trainings-azure-basics-training\a7a6b8eb-22f3-4b42-aecc-5af05d1502b1\scratchpad\folien\assets\logo-dunkel.png">    </p:cNvPr>
           <p:cNvPicPr>
             <a:picLocks noChangeAspect="1"/>
           </p:cNvPicPr>
@@ -1276,7 +1276,7 @@
       </p:pic>
       <p:pic>
         <p:nvPicPr>
-          <p:cNvPr id="3" name="Image 1" descr="C:\Users\Thanam\AppData\Local\Temp\claude\c--Projekt-Trainings-azure-basics-training\a9e0bf4e-0d08-4082-a38a-5b8886538508\scratchpad\pptx\assets\wolke.png">    </p:cNvPr>
+          <p:cNvPr id="3" name="Image 1" descr="C:\Users\Thanam\AppData\Local\Temp\claude\c--Projekt-Trainings-azure-basics-training\a7a6b8eb-22f3-4b42-aecc-5af05d1502b1\scratchpad\folien\assets\wolke.png">    </p:cNvPr>
           <p:cNvPicPr>
             <a:picLocks noChangeAspect="1"/>
           </p:cNvPicPr>
@@ -1324,7 +1324,7 @@
               <a:buNone/>
               <a:defRPr lang="en-US" sz="4400" b="1" dirty="0">
                 <a:solidFill>
-                  <a:srgbClr val="FFFFFF"/>
+                  <a:srgbClr val="27303A"/>
                 </a:solidFill>
               </a:defRPr>
             </a:lvl1pPr>
@@ -1363,7 +1363,7 @@
               <a:buNone/>
               <a:defRPr lang="en-US" sz="2000" dirty="0">
                 <a:solidFill>
-                  <a:srgbClr val="DEE2FB"/>
+                  <a:srgbClr val="006FAD"/>
                 </a:solidFill>
               </a:defRPr>
             </a:lvl1pPr>
@@ -1403,7 +1403,7 @@
             <a:r>
               <a:rPr lang="en-US" sz="1200" dirty="0">
                 <a:solidFill>
-                  <a:srgbClr val="DEE2FB"/>
+                  <a:srgbClr val="6F6F6F"/>
                 </a:solidFill>
               </a:rPr>
               <a:t>Kanton Zürich · ICT-Grundbildung · PAT Cloud Solutions</a:t>
@@ -1426,7 +1426,7 @@
     <p:bg>
       <p:bgPr>
         <a:solidFill>
-          <a:srgbClr val="006FAD"/>
+          <a:srgbClr val="F7F7F7"/>
         </a:solidFill>
       </p:bgPr>
     </p:bg>
@@ -1446,7 +1446,7 @@
       </p:grpSpPr>
       <p:pic>
         <p:nvPicPr>
-          <p:cNvPr id="2" name="Image 0" descr="C:\Users\Thanam\AppData\Local\Temp\claude\c--Projekt-Trainings-azure-basics-training\a9e0bf4e-0d08-4082-a38a-5b8886538508\scratchpad\pptx\assets\wolke.png">    </p:cNvPr>
+          <p:cNvPr id="2" name="Image 0" descr="C:\Users\Thanam\AppData\Local\Temp\claude\c--Projekt-Trainings-azure-basics-training\a7a6b8eb-22f3-4b42-aecc-5af05d1502b1\scratchpad\folien\assets\wolke.png">    </p:cNvPr>
           <p:cNvPicPr>
             <a:picLocks noChangeAspect="1"/>
           </p:cNvPicPr>
@@ -1470,7 +1470,7 @@
       </p:pic>
       <p:pic>
         <p:nvPicPr>
-          <p:cNvPr id="3" name="Image 1" descr="C:\Users\Thanam\AppData\Local\Temp\claude\c--Projekt-Trainings-azure-basics-training\a9e0bf4e-0d08-4082-a38a-5b8886538508\scratchpad\pptx\assets\logo-hell.png">    </p:cNvPr>
+          <p:cNvPr id="3" name="Image 1" descr="C:\Users\Thanam\AppData\Local\Temp\claude\c--Projekt-Trainings-azure-basics-training\a7a6b8eb-22f3-4b42-aecc-5af05d1502b1\scratchpad\folien\assets\logo-dunkel.png">    </p:cNvPr>
           <p:cNvPicPr>
             <a:picLocks noChangeAspect="1"/>
           </p:cNvPicPr>
@@ -1518,7 +1518,7 @@
               <a:buNone/>
               <a:defRPr lang="en-US" sz="4000" b="1" dirty="0">
                 <a:solidFill>
-                  <a:srgbClr val="FFFFFF"/>
+                  <a:srgbClr val="27303A"/>
                 </a:solidFill>
               </a:defRPr>
             </a:lvl1pPr>
@@ -1557,7 +1557,7 @@
               <a:buNone/>
               <a:defRPr lang="en-US" sz="2000" dirty="0">
                 <a:solidFill>
-                  <a:srgbClr val="DEE2FB"/>
+                  <a:srgbClr val="006FAD"/>
                 </a:solidFill>
               </a:defRPr>
             </a:lvl1pPr>
@@ -1604,7 +1604,7 @@
       </p:grpSpPr>
       <p:pic>
         <p:nvPicPr>
-          <p:cNvPr id="2" name="Image 0" descr="C:\Users\Thanam\AppData\Local\Temp\claude\c--Projekt-Trainings-azure-basics-training\a9e0bf4e-0d08-4082-a38a-5b8886538508\scratchpad\pptx\assets\logo-dunkel.png">    </p:cNvPr>
+          <p:cNvPr id="2" name="Image 0" descr="C:\Users\Thanam\AppData\Local\Temp\claude\c--Projekt-Trainings-azure-basics-training\a7a6b8eb-22f3-4b42-aecc-5af05d1502b1\scratchpad\folien\assets\logo-dunkel.png">    </p:cNvPr>
           <p:cNvPicPr>
             <a:picLocks noChangeAspect="1"/>
           </p:cNvPicPr>
@@ -1760,7 +1760,7 @@
     <p:bg>
       <p:bgPr>
         <a:solidFill>
-          <a:srgbClr val="27303A"/>
+          <a:srgbClr val="FFFFFF"/>
         </a:solidFill>
       </p:bgPr>
     </p:bg>
@@ -1780,7 +1780,7 @@
       </p:grpSpPr>
       <p:pic>
         <p:nvPicPr>
-          <p:cNvPr id="2" name="Image 0" descr="C:\Users\Thanam\AppData\Local\Temp\claude\c--Projekt-Trainings-azure-basics-training\a9e0bf4e-0d08-4082-a38a-5b8886538508\scratchpad\pptx\assets\logo-hell.png">    </p:cNvPr>
+          <p:cNvPr id="2" name="Image 0" descr="C:\Users\Thanam\AppData\Local\Temp\claude\c--Projekt-Trainings-azure-basics-training\a7a6b8eb-22f3-4b42-aecc-5af05d1502b1\scratchpad\folien\assets\logo-dunkel.png">    </p:cNvPr>
           <p:cNvPicPr>
             <a:picLocks noChangeAspect="1"/>
           </p:cNvPicPr>
@@ -1828,7 +1828,7 @@
               <a:buNone/>
               <a:defRPr lang="en-US" sz="4000" b="1" dirty="0">
                 <a:solidFill>
-                  <a:srgbClr val="FFFFFF"/>
+                  <a:srgbClr val="27303A"/>
                 </a:solidFill>
               </a:defRPr>
             </a:lvl1pPr>
@@ -1867,7 +1867,7 @@
               <a:buNone/>
               <a:defRPr lang="en-US" sz="2000" dirty="0">
                 <a:solidFill>
-                  <a:srgbClr val="DEE2FB"/>
+                  <a:srgbClr val="006FAD"/>
                 </a:solidFill>
               </a:defRPr>
             </a:lvl1pPr>
@@ -2260,7 +2260,7 @@
             <a:r>
               <a:rPr lang="en-US" sz="4400" b="1" dirty="0">
                 <a:solidFill>
-                  <a:srgbClr val="FFFFFF"/>
+                  <a:srgbClr val="27303A"/>
                 </a:solidFill>
               </a:rPr>
               <a:t>Tag 3: Azure Compute und Storage</a:t>
@@ -2298,7 +2298,7 @@
             <a:r>
               <a:rPr lang="en-US" sz="2000" dirty="0">
                 <a:solidFill>
-                  <a:srgbClr val="DEE2FB"/>
+                  <a:srgbClr val="006FAD"/>
                 </a:solidFill>
               </a:rPr>
               <a:t>Einführung in Cloud Computing mit Microsoft Azure</a:t>
@@ -2460,7 +2460,7 @@
       </p:sp>
       <p:pic>
         <p:nvPicPr>
-          <p:cNvPr id="6" name="icon-FaQuestionCircle" descr="C:\Users\Thanam\AppData\Local\Temp\claude\c--Projekt-Trainings-azure-basics-training\a9e0bf4e-0d08-4082-a38a-5b8886538508\scratchpad\pptx\assets\icons\FaQuestionCircle.png">    </p:cNvPr>
+          <p:cNvPr id="6" name="icon-FaQuestionCircle" descr="C:\Users\Thanam\AppData\Local\Temp\claude\c--Projekt-Trainings-azure-basics-training\a7a6b8eb-22f3-4b42-aecc-5af05d1502b1\scratchpad\folien\assets\icons\FaQuestionCircle.png">    </p:cNvPr>
           <p:cNvPicPr>
             <a:picLocks noChangeAspect="1"/>
           </p:cNvPicPr>
@@ -2613,7 +2613,7 @@
       </p:sp>
       <p:pic>
         <p:nvPicPr>
-          <p:cNvPr id="11" name="icon-FaQuestionCircle" descr="C:\Users\Thanam\AppData\Local\Temp\claude\c--Projekt-Trainings-azure-basics-training\a9e0bf4e-0d08-4082-a38a-5b8886538508\scratchpad\pptx\assets\icons\FaQuestionCircle.png">    </p:cNvPr>
+          <p:cNvPr id="11" name="icon-FaQuestionCircle" descr="C:\Users\Thanam\AppData\Local\Temp\claude\c--Projekt-Trainings-azure-basics-training\a7a6b8eb-22f3-4b42-aecc-5af05d1502b1\scratchpad\folien\assets\icons\FaQuestionCircle.png">    </p:cNvPr>
           <p:cNvPicPr>
             <a:picLocks noChangeAspect="1"/>
           </p:cNvPicPr>
@@ -2766,7 +2766,7 @@
       </p:sp>
       <p:pic>
         <p:nvPicPr>
-          <p:cNvPr id="16" name="icon-FaQuestionCircle" descr="C:\Users\Thanam\AppData\Local\Temp\claude\c--Projekt-Trainings-azure-basics-training\a9e0bf4e-0d08-4082-a38a-5b8886538508\scratchpad\pptx\assets\icons\FaQuestionCircle.png">    </p:cNvPr>
+          <p:cNvPr id="16" name="icon-FaQuestionCircle" descr="C:\Users\Thanam\AppData\Local\Temp\claude\c--Projekt-Trainings-azure-basics-training\a7a6b8eb-22f3-4b42-aecc-5af05d1502b1\scratchpad\folien\assets\icons\FaQuestionCircle.png">    </p:cNvPr>
           <p:cNvPicPr>
             <a:picLocks noChangeAspect="1"/>
           </p:cNvPicPr>
@@ -3027,7 +3027,7 @@
       </p:sp>
       <p:pic>
         <p:nvPicPr>
-          <p:cNvPr id="5" name="icon-FaServer" descr="C:\Users\Thanam\AppData\Local\Temp\claude\c--Projekt-Trainings-azure-basics-training\a9e0bf4e-0d08-4082-a38a-5b8886538508\scratchpad\pptx\assets\icons\FaServer.png">    </p:cNvPr>
+          <p:cNvPr id="5" name="icon-FaServer" descr="C:\Users\Thanam\AppData\Local\Temp\claude\c--Projekt-Trainings-azure-basics-training\a7a6b8eb-22f3-4b42-aecc-5af05d1502b1\scratchpad\folien\assets\icons\FaServer.png">    </p:cNvPr>
           <p:cNvPicPr>
             <a:picLocks noChangeAspect="1"/>
           </p:cNvPicPr>
@@ -3180,7 +3180,7 @@
       </p:sp>
       <p:pic>
         <p:nvPicPr>
-          <p:cNvPr id="10" name="icon-FaCubes" descr="C:\Users\Thanam\AppData\Local\Temp\claude\c--Projekt-Trainings-azure-basics-training\a9e0bf4e-0d08-4082-a38a-5b8886538508\scratchpad\pptx\assets\icons\FaCubes.png">    </p:cNvPr>
+          <p:cNvPr id="10" name="icon-FaCubes" descr="C:\Users\Thanam\AppData\Local\Temp\claude\c--Projekt-Trainings-azure-basics-training\a7a6b8eb-22f3-4b42-aecc-5af05d1502b1\scratchpad\folien\assets\icons\FaCubes.png">    </p:cNvPr>
           <p:cNvPicPr>
             <a:picLocks noChangeAspect="1"/>
           </p:cNvPicPr>
@@ -3333,7 +3333,7 @@
       </p:sp>
       <p:pic>
         <p:nvPicPr>
-          <p:cNvPr id="15" name="icon-FaDatabase" descr="C:\Users\Thanam\AppData\Local\Temp\claude\c--Projekt-Trainings-azure-basics-training\a9e0bf4e-0d08-4082-a38a-5b8886538508\scratchpad\pptx\assets\icons\FaDatabase.png">    </p:cNvPr>
+          <p:cNvPr id="15" name="icon-FaDatabase" descr="C:\Users\Thanam\AppData\Local\Temp\claude\c--Projekt-Trainings-azure-basics-training\a7a6b8eb-22f3-4b42-aecc-5af05d1502b1\scratchpad\folien\assets\icons\FaDatabase.png">    </p:cNvPr>
           <p:cNvPicPr>
             <a:picLocks noChangeAspect="1"/>
           </p:cNvPicPr>
@@ -3486,7 +3486,7 @@
       </p:sp>
       <p:pic>
         <p:nvPicPr>
-          <p:cNvPr id="20" name="icon-FaExchangeAlt" descr="C:\Users\Thanam\AppData\Local\Temp\claude\c--Projekt-Trainings-azure-basics-training\a9e0bf4e-0d08-4082-a38a-5b8886538508\scratchpad\pptx\assets\icons\FaExchangeAlt.png">    </p:cNvPr>
+          <p:cNvPr id="20" name="icon-FaExchangeAlt" descr="C:\Users\Thanam\AppData\Local\Temp\claude\c--Projekt-Trainings-azure-basics-training\a7a6b8eb-22f3-4b42-aecc-5af05d1502b1\scratchpad\folien\assets\icons\FaExchangeAlt.png">    </p:cNvPr>
           <p:cNvPicPr>
             <a:picLocks noChangeAspect="1"/>
           </p:cNvPicPr>
@@ -6800,7 +6800,7 @@
       </p:sp>
       <p:pic>
         <p:nvPicPr>
-          <p:cNvPr id="5" name="icon-FaMicrochip" descr="C:\Users\Thanam\AppData\Local\Temp\claude\c--Projekt-Trainings-azure-basics-training\a9e0bf4e-0d08-4082-a38a-5b8886538508\scratchpad\pptx\assets\icons\FaMicrochip.png">    </p:cNvPr>
+          <p:cNvPr id="5" name="icon-FaMicrochip" descr="C:\Users\Thanam\AppData\Local\Temp\claude\c--Projekt-Trainings-azure-basics-training\a7a6b8eb-22f3-4b42-aecc-5af05d1502b1\scratchpad\folien\assets\icons\FaMicrochip.png">    </p:cNvPr>
           <p:cNvPicPr>
             <a:picLocks noChangeAspect="1"/>
           </p:cNvPicPr>
@@ -6953,7 +6953,7 @@
       </p:sp>
       <p:pic>
         <p:nvPicPr>
-          <p:cNvPr id="10" name="icon-FaServer" descr="C:\Users\Thanam\AppData\Local\Temp\claude\c--Projekt-Trainings-azure-basics-training\a9e0bf4e-0d08-4082-a38a-5b8886538508\scratchpad\pptx\assets\icons\FaServer.png">    </p:cNvPr>
+          <p:cNvPr id="10" name="icon-FaServer" descr="C:\Users\Thanam\AppData\Local\Temp\claude\c--Projekt-Trainings-azure-basics-training\a7a6b8eb-22f3-4b42-aecc-5af05d1502b1\scratchpad\folien\assets\icons\FaServer.png">    </p:cNvPr>
           <p:cNvPicPr>
             <a:picLocks noChangeAspect="1"/>
           </p:cNvPicPr>
@@ -7106,7 +7106,7 @@
       </p:sp>
       <p:pic>
         <p:nvPicPr>
-          <p:cNvPr id="15" name="icon-FaTrashAlt" descr="C:\Users\Thanam\AppData\Local\Temp\claude\c--Projekt-Trainings-azure-basics-training\a9e0bf4e-0d08-4082-a38a-5b8886538508\scratchpad\pptx\assets\icons\FaTrashAlt.png">    </p:cNvPr>
+          <p:cNvPr id="15" name="icon-FaTrashAlt" descr="C:\Users\Thanam\AppData\Local\Temp\claude\c--Projekt-Trainings-azure-basics-training\a7a6b8eb-22f3-4b42-aecc-5af05d1502b1\scratchpad\folien\assets\icons\FaTrashAlt.png">    </p:cNvPr>
           <p:cNvPicPr>
             <a:picLocks noChangeAspect="1"/>
           </p:cNvPicPr>
@@ -7199,7 +7199,7 @@
                   <a:srgbClr val="27303A"/>
                 </a:solidFill>
               </a:rPr>
-              <a:t>sudo poweroff spart kein Geld. Am Ende die Ressourcengruppe löschen.</a:t>
+              <a:t>sudo poweroff spart kein Geld. Nur eine gelöschte VM kostet nichts mehr.</a:t>
             </a:r>
             <a:endParaRPr lang="en-US" sz="1600" dirty="0"/>
           </a:p>
@@ -7367,7 +7367,7 @@
       </p:sp>
       <p:pic>
         <p:nvPicPr>
-          <p:cNvPr id="5" name="icon-FaCoins" descr="C:\Users\Thanam\AppData\Local\Temp\claude\c--Projekt-Trainings-azure-basics-training\a9e0bf4e-0d08-4082-a38a-5b8886538508\scratchpad\pptx\assets\icons\FaCoins.png">    </p:cNvPr>
+          <p:cNvPr id="5" name="icon-FaCoins" descr="C:\Users\Thanam\AppData\Local\Temp\claude\c--Projekt-Trainings-azure-basics-training\a7a6b8eb-22f3-4b42-aecc-5af05d1502b1\scratchpad\folien\assets\icons\FaCoins.png">    </p:cNvPr>
           <p:cNvPicPr>
             <a:picLocks noChangeAspect="1"/>
           </p:cNvPicPr>
@@ -7520,7 +7520,7 @@
       </p:sp>
       <p:pic>
         <p:nvPicPr>
-          <p:cNvPr id="10" name="icon-FaDoorOpen" descr="C:\Users\Thanam\AppData\Local\Temp\claude\c--Projekt-Trainings-azure-basics-training\a9e0bf4e-0d08-4082-a38a-5b8886538508\scratchpad\pptx\assets\icons\FaDoorOpen.png">    </p:cNvPr>
+          <p:cNvPr id="10" name="icon-FaDoorOpen" descr="C:\Users\Thanam\AppData\Local\Temp\claude\c--Projekt-Trainings-azure-basics-training\a7a6b8eb-22f3-4b42-aecc-5af05d1502b1\scratchpad\folien\assets\icons\FaDoorOpen.png">    </p:cNvPr>
           <p:cNvPicPr>
             <a:picLocks noChangeAspect="1"/>
           </p:cNvPicPr>
@@ -7718,10 +7718,10 @@
             <a:r>
               <a:rPr lang="en-US" sz="4000" b="1" dirty="0">
                 <a:solidFill>
-                  <a:srgbClr val="FFFFFF"/>
+                  <a:srgbClr val="27303A"/>
                 </a:solidFill>
               </a:rPr>
-              <a:t>Morgen: Netzwerke bauen</a:t>
+              <a:t>Nächstes Mal: Netzwerke bauen</a:t>
             </a:r>
             <a:endParaRPr lang="en-US" sz="4000" dirty="0"/>
           </a:p>
@@ -7756,7 +7756,7 @@
             <a:r>
               <a:rPr lang="en-US" sz="2000" dirty="0">
                 <a:solidFill>
-                  <a:srgbClr val="DEE2FB"/>
+                  <a:srgbClr val="006FAD"/>
                 </a:solidFill>
               </a:rPr>
               <a:t>Tag 4 · Azure Networking</a:t>
@@ -7767,7 +7767,7 @@
       </p:sp>
       <p:sp>
         <p:nvSpPr>
-          <p:cNvPr id="4" name="karte-dunkel"/>
+          <p:cNvPr id="4" name="karte"/>
           <p:cNvSpPr/>
           <p:nvPr/>
         </p:nvSpPr>
@@ -7782,11 +7782,11 @@
             </a:avLst>
           </a:prstGeom>
           <a:solidFill>
-            <a:srgbClr val="323C48"/>
+            <a:srgbClr val="F7F7F7"/>
           </a:solidFill>
           <a:ln w="12700">
             <a:solidFill>
-              <a:srgbClr val="323C48"/>
+              <a:srgbClr val="F7F7F7"/>
             </a:solidFill>
             <a:prstDash val="solid"/>
           </a:ln>
@@ -7819,7 +7819,7 @@
       </p:sp>
       <p:pic>
         <p:nvPicPr>
-          <p:cNvPr id="6" name="icon-FaSitemap" descr="C:\Users\Thanam\AppData\Local\Temp\claude\c--Projekt-Trainings-azure-basics-training\a9e0bf4e-0d08-4082-a38a-5b8886538508\scratchpad\pptx\assets\icons\FaSitemap.png">    </p:cNvPr>
+          <p:cNvPr id="6" name="icon-FaSitemap" descr="C:\Users\Thanam\AppData\Local\Temp\claude\c--Projekt-Trainings-azure-basics-training\a7a6b8eb-22f3-4b42-aecc-5af05d1502b1\scratchpad\folien\assets\icons\FaSitemap.png">    </p:cNvPr>
           <p:cNvPicPr>
             <a:picLocks noChangeAspect="1"/>
           </p:cNvPicPr>
@@ -7868,7 +7868,7 @@
             <a:r>
               <a:rPr lang="en-US" sz="2000" b="1" dirty="0">
                 <a:solidFill>
-                  <a:srgbClr val="FFFFFF"/>
+                  <a:srgbClr val="27303A"/>
                 </a:solidFill>
               </a:rPr>
               <a:t>Subnetting</a:t>
@@ -7904,7 +7904,7 @@
             <a:r>
               <a:rPr lang="en-US" sz="1600" dirty="0">
                 <a:solidFill>
-                  <a:srgbClr val="DEE2FB"/>
+                  <a:srgbClr val="27303A"/>
                 </a:solidFill>
               </a:rPr>
               <a:t>CIDR auffrischen: Was bedeutet /24?</a:t>
@@ -7915,7 +7915,7 @@
       </p:sp>
       <p:sp>
         <p:nvSpPr>
-          <p:cNvPr id="9" name="karte-dunkel"/>
+          <p:cNvPr id="9" name="karte"/>
           <p:cNvSpPr/>
           <p:nvPr/>
         </p:nvSpPr>
@@ -7930,11 +7930,11 @@
             </a:avLst>
           </a:prstGeom>
           <a:solidFill>
-            <a:srgbClr val="323C48"/>
+            <a:srgbClr val="F7F7F7"/>
           </a:solidFill>
           <a:ln w="12700">
             <a:solidFill>
-              <a:srgbClr val="323C48"/>
+              <a:srgbClr val="F7F7F7"/>
             </a:solidFill>
             <a:prstDash val="solid"/>
           </a:ln>
@@ -7967,7 +7967,7 @@
       </p:sp>
       <p:pic>
         <p:nvPicPr>
-          <p:cNvPr id="11" name="icon-FaShieldAlt" descr="C:\Users\Thanam\AppData\Local\Temp\claude\c--Projekt-Trainings-azure-basics-training\a9e0bf4e-0d08-4082-a38a-5b8886538508\scratchpad\pptx\assets\icons\FaShieldAlt.png">    </p:cNvPr>
+          <p:cNvPr id="11" name="icon-FaShieldAlt" descr="C:\Users\Thanam\AppData\Local\Temp\claude\c--Projekt-Trainings-azure-basics-training\a7a6b8eb-22f3-4b42-aecc-5af05d1502b1\scratchpad\folien\assets\icons\FaShieldAlt.png">    </p:cNvPr>
           <p:cNvPicPr>
             <a:picLocks noChangeAspect="1"/>
           </p:cNvPicPr>
@@ -8016,7 +8016,7 @@
             <a:r>
               <a:rPr lang="en-US" sz="2000" b="1" dirty="0">
                 <a:solidFill>
-                  <a:srgbClr val="FFFFFF"/>
+                  <a:srgbClr val="27303A"/>
                 </a:solidFill>
               </a:rPr>
               <a:t>NSG</a:t>
@@ -8052,7 +8052,7 @@
             <a:r>
               <a:rPr lang="en-US" sz="1600" dirty="0">
                 <a:solidFill>
-                  <a:srgbClr val="DEE2FB"/>
+                  <a:srgbClr val="27303A"/>
                 </a:solidFill>
               </a:rPr>
               <a:t>Wer darf rein – und wer nicht?</a:t>
